--- a/assets/pptx/catalog-152.pptx
+++ b/assets/pptx/catalog-152.pptx
@@ -3373,7 +3373,7 @@
                 <a:ea typeface="Ebrima"/>
                 <a:cs typeface="Ebrima"/>
               </a:rPr>
-              <a:t>እግዚአብሔር እንዳንተ ማንም የለም (2x)</a:t>
+              <a:t>እግዚአብሔር እንዳንተ ማንም የለም 2x</a:t>
             </a:r>
           </a:p>
           <a:p>
@@ -3597,7 +3597,7 @@
                 <a:ea typeface="Ebrima"/>
                 <a:cs typeface="Ebrima"/>
               </a:rPr>
-              <a:t>እግዚአብሔር እንዳንተ ማንም የለም (2x)</a:t>
+              <a:t>እግዚአብሔር እንዳንተ ማንም የለም 2x</a:t>
             </a:r>
           </a:p>
           <a:p>
@@ -3700,7 +3700,7 @@
                 <a:ea typeface="Ebrima"/>
                 <a:cs typeface="Ebrima"/>
               </a:rPr>
-              <a:t>ደጃፌን ዘግቼ ስልህ አንተ ትሰማኛለህ (2x)</a:t>
+              <a:t>ደጃፌን ዘግቼ ስልህ አንተ ትሰማኛለህ 2x</a:t>
             </a:r>
           </a:p>
           <a:p>
@@ -3718,7 +3718,7 @@
                 <a:ea typeface="Ebrima"/>
                 <a:cs typeface="Ebrima"/>
               </a:rPr>
-              <a:t>በስውር የነገርኩህን በግልጽ ትቀፍለኛለህ (2x)</a:t>
+              <a:t>በስውር የነገርኩህን በግልጽ ትቀፍለኛለህ 2x</a:t>
             </a:r>
           </a:p>
         </p:txBody>
@@ -3803,7 +3803,7 @@
                 <a:ea typeface="Ebrima"/>
                 <a:cs typeface="Ebrima"/>
               </a:rPr>
-              <a:t>ልቤን ደግሞ ላንተ አሳይሃለሁ (2x)</a:t>
+              <a:t>ልቤን ደግሞ ላንተ አሳይሃለሁ 2x</a:t>
             </a:r>
           </a:p>
         </p:txBody>
@@ -3870,7 +3870,7 @@
                 <a:ea typeface="Ebrima"/>
                 <a:cs typeface="Ebrima"/>
               </a:rPr>
-              <a:t>ሚረዳኝ የሚረዳኝ ነው (2x)</a:t>
+              <a:t>ሚረዳኝ የሚረዳኝ ነው 2x</a:t>
             </a:r>
           </a:p>
           <a:p>
@@ -3973,7 +3973,7 @@
                 <a:ea typeface="Ebrima"/>
                 <a:cs typeface="Ebrima"/>
               </a:rPr>
-              <a:t>ሚረዳኝ የሚረዳኝ ነው (2x)</a:t>
+              <a:t>ሚረዳኝ የሚረዳኝ ነው 2x</a:t>
             </a:r>
           </a:p>
           <a:p>
@@ -4166,7 +4166,7 @@
                 <a:ea typeface="Ebrima"/>
                 <a:cs typeface="Ebrima"/>
               </a:rPr>
-              <a:t>ለሰው ባወራው ምን አገኛለሁ (2x)</a:t>
+              <a:t>ለሰው ባወራው ምን አገኛለሁ 2x</a:t>
             </a:r>
           </a:p>
         </p:txBody>
@@ -4251,7 +4251,7 @@
                 <a:ea typeface="Ebrima"/>
                 <a:cs typeface="Ebrima"/>
               </a:rPr>
-              <a:t>ልቤን ደግሞ ለአንተ አሳይሃለሁ (2x)</a:t>
+              <a:t>ልቤን ደግሞ ለአንተ አሳይሃለሁ 2x</a:t>
             </a:r>
           </a:p>
         </p:txBody>
@@ -4336,7 +4336,7 @@
                 <a:ea typeface="Ebrima"/>
                 <a:cs typeface="Ebrima"/>
               </a:rPr>
-              <a:t>የምትደግፍ አንተን ስላየሁ (2x)</a:t>
+              <a:t>የምትደግፍ አንተን ስላየሁ 2x</a:t>
             </a:r>
           </a:p>
         </p:txBody>
@@ -4421,7 +4421,7 @@
                 <a:ea typeface="Ebrima"/>
                 <a:cs typeface="Ebrima"/>
               </a:rPr>
-              <a:t>የልብ የሚረዳ ጌታ እንዳንተ ማነው (2x)</a:t>
+              <a:t>የልብ የሚረዳ ጌታ እንዳንተ ማነው 2x</a:t>
             </a:r>
           </a:p>
         </p:txBody>
